--- a/decks/geog-urban/geog-urban_ch3_rio-challenges.pptx
+++ b/decks/geog-urban/geog-urban_ch3_rio-challenges.pptx
@@ -125,30 +125,30 @@
   <p:extLst>
     <p:ext uri="{521415D9-36F7-43E2-AB2F-B90AF26B5E84}">
       <p14:sectionLst xmlns:p14="http://schemas.microsoft.com/office/powerpoint/2010/main">
-        <p14:section name="Opening" id="{ebbc2dd4-7d55-324d-ab13-4fdac271c841}">
+        <p14:section name="Opening" id="{79407bd0-f3ae-7948-c0e0-56d551a78b1f}">
           <p14:sldIdLst>
             <p14:sldId id="256"/>
           </p14:sldIdLst>
         </p14:section>
-        <p14:section name="Gate" id="{2f10e197-6135-f518-6c03-5f9048e25eec}">
+        <p14:section name="Gate" id="{e505c0f9-5bd7-602e-9b07-c50ec57643c1}">
           <p14:sldIdLst>
             <p14:sldId id="257"/>
             <p14:sldId id="258"/>
           </p14:sldIdLst>
         </p14:section>
-        <p14:section name="Pre-teach" id="{7632c44d-6c8b-f8d3-6657-35d6ad3dbd6f}">
+        <p14:section name="Pre-teach" id="{2ebbbf47-4743-781d-d6da-7b2666230b42}">
           <p14:sldIdLst>
             <p14:sldId id="259"/>
             <p14:sldId id="260"/>
           </p14:sldIdLst>
         </p14:section>
-        <p14:section name="Read-along" id="{0c2fd9c3-a397-6b05-305e-3c023e857b0f}">
+        <p14:section name="Read-along" id="{810a0381-7e61-17ad-1a39-f6cb5e24b25f}">
           <p14:sldIdLst>
             <p14:sldId id="261"/>
             <p14:sldId id="262"/>
           </p14:sldIdLst>
         </p14:section>
-        <p14:section name="Teach" id="{b52d29ea-e570-70c4-f0b0-c3bf285d44f0}">
+        <p14:section name="Teach" id="{89768516-94bc-cf20-4b02-88f268b575b8}">
           <p14:sldIdLst>
             <p14:sldId id="263"/>
             <p14:sldId id="264"/>
@@ -156,7 +156,7 @@
             <p14:sldId id="266"/>
           </p14:sldIdLst>
         </p14:section>
-        <p14:section name="Routes" id="{de5c79ab-722b-7a20-ff3c-0f16dd650b52}">
+        <p14:section name="Routes" id="{9c767351-6fde-ce9a-9eb0-0fd0cb18df8c}">
           <p14:sldIdLst>
             <p14:sldId id="267"/>
             <p14:sldId id="268"/>
@@ -164,12 +164,12 @@
             <p14:sldId id="270"/>
           </p14:sldIdLst>
         </p14:section>
-        <p14:section name="Close" id="{3656fd83-3107-18bb-a68e-fd973466ab7c}">
+        <p14:section name="Close" id="{a7da17bf-fb70-dc2d-a068-37b78a2cf3d5}">
           <p14:sldIdLst>
             <p14:sldId id="271"/>
           </p14:sldIdLst>
         </p14:section>
-        <p14:section name="Answers" id="{8b775ef5-8e57-d6d4-96ac-eea3d174999e}">
+        <p14:section name="Answers" id="{2b7c158b-1f9e-bf0d-becb-f21a279f26bb}">
           <p14:sldIdLst>
             <p14:sldId id="272"/>
             <p14:sldId id="273"/>
@@ -672,7 +672,7 @@
             <a:r>
               <a:rPr lang="en-US" dirty="0"/>
               <a:t>Teach — Economic challenges: the informal sector. Say it in your own words, then check understanding with a quick question: ask a pupil from the pre-teach group first, since they met these words and ideas before the lesson. Pupils try to recall before you re-explain.
-Rio's economy was hit hard by Brazil's deep recession in 2015. People have protested about high taxes, poor education and inadequate health care. In the favelas, unemployment is over 20%. The lesson sorted the economic challenges under three headings: lack of economic growth, unemployment and crime.
+Rio's economy was hit hard by Brazil's deep recession in 2015. Protests followed, against high taxes and against poor schooling and health care. In the favelas, unemployment is over 20%. The lesson sorted the economic challenges under three headings: lack of economic growth, unemployment and crime.
 Many people who cannot find a formal job work in the informal sector. The informal sector is the part of the economy that is neither taxed nor monitored by any form of government: people simply trying to make money by any means they can. Typical informal jobs are street vendors selling food, drivers, labourers, handicraft workers, sewing and maids. The pay is poor and the work is irregular; workers are usually paid cash in hand and pay no tax, so the government gets no money from them to spend on services. Compare the formal sector: jobs with contracts, regular wages and tax, such as the jobs at the steelworks, in offices or at the port.
 Crime is a big issue in Rio. There are many gangs trafficking drugs in the favelas, and street crime affects everyone. One response has been pacifying police units, which aim to reduce crime in the favelas. Another is education: with a better education, young people have more career options and can adapt to change, which helps to reduce youth unemployment.
 Worked example — model it step by step, thinking aloud: In 1975 about 25% of Africa's population and 66% of Europe's population lived in urban areas. What was the difference between the two percentages? (1) Pick out the two figures: Africa 25%, Europe 66%. (2) Difference means subtract the smaller from the larger: 66 − 25. (3) 66 − 25 = 41. (4) Answer in percentage points: 41. Answer: 41 percentage points.
@@ -2255,7 +2255,7 @@
             <a:r>
               <a:rPr lang="en-US" dirty="0"/>
               <a:t>Teach — Economic challenges: the informal sector. Say it in your own words, then check understanding with a quick question: ask a pupil from the pre-teach group first, since they met these words and ideas before the lesson. Pupils try to recall before you re-explain.
-Rio's economy was hit hard by Brazil's deep recession in 2015. People have protested about high taxes, poor education and inadequate health care. In the favelas, unemployment is over 20%. The lesson sorted the economic challenges under three headings: lack of economic growth, unemployment and crime.
+Rio's economy was hit hard by Brazil's deep recession in 2015. Protests followed, against high taxes and against poor schooling and health care. In the favelas, unemployment is over 20%. The lesson sorted the economic challenges under three headings: lack of economic growth, unemployment and crime.
 Many people who cannot find a formal job work in the informal sector. The informal sector is the part of the economy that is neither taxed nor monitored by any form of government: people simply trying to make money by any means they can. Typical informal jobs are street vendors selling food, drivers, labourers, handicraft workers, sewing and maids. The pay is poor and the work is irregular; workers are usually paid cash in hand and pay no tax, so the government gets no money from them to spend on services. Compare the formal sector: jobs with contracts, regular wages and tax, such as the jobs at the steelworks, in offices or at the port.
 Crime is a big issue in Rio. There are many gangs trafficking drugs in the favelas, and street crime affects everyone. One response has been pacifying police units, which aim to reduce crime in the favelas. Another is education: with a better education, young people have more career options and can adapt to change, which helps to reduce youth unemployment.
 Worked example — model it step by step, thinking aloud: In 1975 about 25% of Africa's population and 66% of Europe's population lived in urban areas. What was the difference between the two percentages? (1) Pick out the two figures: Africa 25%, Europe 66%. (2) Difference means subtract the smaller from the larger: 66 − 25. (3) 66 − 25 = 41. (4) Answer in percentage points: 41. Answer: 41 percentage points.
